--- a/media/exports/reports/2026-03/growth-services.pptx
+++ b/media/exports/reports/2026-03/growth-services.pptx
@@ -228,58 +228,58 @@
                 <c:formatCode>$#,##0;[Red]($#,##0);"-"</c:formatCode>
                 <c:ptCount val="18"/>
                 <c:pt idx="0">
-                  <c:v>94520</c:v>
+                  <c:v>103550</c:v>
                 </c:pt>
                 <c:pt idx="1">
-                  <c:v>108140</c:v>
+                  <c:v>118390</c:v>
                 </c:pt>
                 <c:pt idx="2">
-                  <c:v>114895</c:v>
+                  <c:v>125715</c:v>
                 </c:pt>
                 <c:pt idx="3">
-                  <c:v>88250</c:v>
+                  <c:v>96560</c:v>
                 </c:pt>
                 <c:pt idx="4">
-                  <c:v>111010</c:v>
+                  <c:v>121275</c:v>
                 </c:pt>
                 <c:pt idx="5">
-                  <c:v>77175</c:v>
+                  <c:v>84340</c:v>
                 </c:pt>
                 <c:pt idx="6">
-                  <c:v>63970</c:v>
+                  <c:v>69985</c:v>
                 </c:pt>
                 <c:pt idx="7">
-                  <c:v>95555</c:v>
+                  <c:v>104970</c:v>
                 </c:pt>
                 <c:pt idx="8">
-                  <c:v>90220</c:v>
+                  <c:v>99060</c:v>
                 </c:pt>
                 <c:pt idx="9">
-                  <c:v>86320</c:v>
+                  <c:v>94805</c:v>
                 </c:pt>
                 <c:pt idx="10">
-                  <c:v>61475</c:v>
+                  <c:v>67745</c:v>
                 </c:pt>
                 <c:pt idx="11">
-                  <c:v>59535</c:v>
+                  <c:v>65650</c:v>
                 </c:pt>
                 <c:pt idx="12">
-                  <c:v>71260</c:v>
+                  <c:v>78550</c:v>
                 </c:pt>
                 <c:pt idx="13">
-                  <c:v>83940</c:v>
+                  <c:v>92575</c:v>
                 </c:pt>
                 <c:pt idx="14">
-                  <c:v>69420</c:v>
+                  <c:v>76600</c:v>
                 </c:pt>
                 <c:pt idx="15">
-                  <c:v>92370</c:v>
+                  <c:v>102350</c:v>
                 </c:pt>
                 <c:pt idx="16">
-                  <c:v>100055</c:v>
+                  <c:v>110835</c:v>
                 </c:pt>
                 <c:pt idx="17">
-                  <c:v>109865</c:v>
+                  <c:v>121215</c:v>
                 </c:pt>
               </c:numCache>
             </c:numRef>
@@ -328,7 +328,7 @@
         <c:axId val="-2100718248"/>
         <c:scaling>
           <c:orientation val="minMax"/>
-          <c:max val="125000.0"/>
+          <c:max val="150000.0"/>
           <c:min val="0.0"/>
         </c:scaling>
         <c:delete val="0"/>
@@ -363,7 +363,7 @@
         <c:crossAx val="-2101159928"/>
         <c:crosses val="autoZero"/>
         <c:crossBetween val="midCat"/>
-        <c:majorUnit val="25000.0"/>
+        <c:majorUnit val="50000.0"/>
       </c:valAx>
     </c:plotArea>
     <c:plotVisOnly val="1"/>
@@ -504,58 +504,58 @@
                 <c:formatCode>$#,##0;[Red]($#,##0);"-"</c:formatCode>
                 <c:ptCount val="18"/>
                 <c:pt idx="0">
-                  <c:v>70720</c:v>
+                  <c:v>77350</c:v>
                 </c:pt>
                 <c:pt idx="1">
-                  <c:v>88540</c:v>
+                  <c:v>96790</c:v>
                 </c:pt>
                 <c:pt idx="2">
-                  <c:v>94695</c:v>
+                  <c:v>103515</c:v>
                 </c:pt>
                 <c:pt idx="3">
-                  <c:v>66850</c:v>
+                  <c:v>73060</c:v>
                 </c:pt>
                 <c:pt idx="4">
-                  <c:v>84410</c:v>
+                  <c:v>92075</c:v>
                 </c:pt>
                 <c:pt idx="5">
-                  <c:v>48975</c:v>
+                  <c:v>53340</c:v>
                 </c:pt>
                 <c:pt idx="6">
-                  <c:v>37570</c:v>
+                  <c:v>40885</c:v>
                 </c:pt>
                 <c:pt idx="7">
-                  <c:v>59755</c:v>
+                  <c:v>65570</c:v>
                 </c:pt>
                 <c:pt idx="8">
-                  <c:v>64520</c:v>
+                  <c:v>70760</c:v>
                 </c:pt>
                 <c:pt idx="9">
-                  <c:v>64820</c:v>
+                  <c:v>71205</c:v>
                 </c:pt>
                 <c:pt idx="10">
-                  <c:v>38775</c:v>
+                  <c:v>42845</c:v>
                 </c:pt>
                 <c:pt idx="11">
-                  <c:v>38035</c:v>
+                  <c:v>42050</c:v>
                 </c:pt>
                 <c:pt idx="12">
-                  <c:v>45860</c:v>
+                  <c:v>50650</c:v>
                 </c:pt>
                 <c:pt idx="13">
-                  <c:v>46840</c:v>
+                  <c:v>51775</c:v>
                 </c:pt>
                 <c:pt idx="14">
-                  <c:v>29520</c:v>
+                  <c:v>32800</c:v>
                 </c:pt>
                 <c:pt idx="15">
-                  <c:v>60170</c:v>
+                  <c:v>66950</c:v>
                 </c:pt>
                 <c:pt idx="16">
-                  <c:v>62955</c:v>
+                  <c:v>70035</c:v>
                 </c:pt>
                 <c:pt idx="17">
-                  <c:v>75165</c:v>
+                  <c:v>83115</c:v>
                 </c:pt>
               </c:numCache>
             </c:numRef>
@@ -604,7 +604,7 @@
         <c:axId val="-2100718248"/>
         <c:scaling>
           <c:orientation val="minMax"/>
-          <c:max val="100000.0"/>
+          <c:max val="125000.0"/>
           <c:min val="0.0"/>
         </c:scaling>
         <c:delete val="0"/>
@@ -639,7 +639,7 @@
         <c:crossAx val="-2101159928"/>
         <c:crosses val="autoZero"/>
         <c:crossBetween val="midCat"/>
-        <c:majorUnit val="20000.0"/>
+        <c:majorUnit val="25000.0"/>
       </c:valAx>
     </c:plotArea>
     <c:plotVisOnly val="1"/>
@@ -780,58 +780,58 @@
                 <c:formatCode>$#,##0;[Red]($#,##0);"-"</c:formatCode>
                 <c:ptCount val="18"/>
                 <c:pt idx="0">
-                  <c:v>15000</c:v>
+                  <c:v>16500</c:v>
                 </c:pt>
                 <c:pt idx="1">
-                  <c:v>15000</c:v>
+                  <c:v>16500</c:v>
                 </c:pt>
                 <c:pt idx="2">
-                  <c:v>15000</c:v>
+                  <c:v>16500</c:v>
                 </c:pt>
                 <c:pt idx="3">
-                  <c:v>15000</c:v>
+                  <c:v>16500</c:v>
                 </c:pt>
                 <c:pt idx="4">
-                  <c:v>15000</c:v>
+                  <c:v>16500</c:v>
                 </c:pt>
                 <c:pt idx="5">
-                  <c:v>21800</c:v>
+                  <c:v>24000</c:v>
                 </c:pt>
                 <c:pt idx="6">
-                  <c:v>21800</c:v>
+                  <c:v>24000</c:v>
                 </c:pt>
                 <c:pt idx="7">
-                  <c:v>21800</c:v>
+                  <c:v>24000</c:v>
                 </c:pt>
                 <c:pt idx="8">
-                  <c:v>21800</c:v>
+                  <c:v>24000</c:v>
                 </c:pt>
                 <c:pt idx="9">
-                  <c:v>16300</c:v>
+                  <c:v>17900</c:v>
                 </c:pt>
                 <c:pt idx="10">
-                  <c:v>16300</c:v>
+                  <c:v>17900</c:v>
                 </c:pt>
                 <c:pt idx="11">
-                  <c:v>16300</c:v>
+                  <c:v>17900</c:v>
                 </c:pt>
                 <c:pt idx="12">
-                  <c:v>16300</c:v>
+                  <c:v>17900</c:v>
                 </c:pt>
                 <c:pt idx="13">
-                  <c:v>28300</c:v>
+                  <c:v>31100</c:v>
                 </c:pt>
                 <c:pt idx="14">
-                  <c:v>28300</c:v>
+                  <c:v>31100</c:v>
                 </c:pt>
                 <c:pt idx="15">
-                  <c:v>28300</c:v>
+                  <c:v>31100</c:v>
                 </c:pt>
                 <c:pt idx="16">
-                  <c:v>28300</c:v>
+                  <c:v>31100</c:v>
                 </c:pt>
                 <c:pt idx="17">
-                  <c:v>28300</c:v>
+                  <c:v>31100</c:v>
                 </c:pt>
               </c:numCache>
             </c:numRef>
@@ -880,7 +880,7 @@
         <c:axId val="-2100718248"/>
         <c:scaling>
           <c:orientation val="minMax"/>
-          <c:max val="30000.0"/>
+          <c:max val="40000.0"/>
           <c:min val="0.0"/>
         </c:scaling>
         <c:delete val="0"/>
@@ -1056,58 +1056,58 @@
                 <c:formatCode>$#,##0;[Red]($#,##0);"-"</c:formatCode>
                 <c:ptCount val="18"/>
                 <c:pt idx="0">
-                  <c:v>8800</c:v>
+                  <c:v>9700</c:v>
                 </c:pt>
                 <c:pt idx="1">
-                  <c:v>4600</c:v>
+                  <c:v>5100</c:v>
                 </c:pt>
                 <c:pt idx="2">
-                  <c:v>5200</c:v>
+                  <c:v>5700</c:v>
                 </c:pt>
                 <c:pt idx="3">
-                  <c:v>6400</c:v>
+                  <c:v>7000</c:v>
                 </c:pt>
                 <c:pt idx="4">
-                  <c:v>11600</c:v>
+                  <c:v>12700</c:v>
                 </c:pt>
                 <c:pt idx="5">
-                  <c:v>6400</c:v>
+                  <c:v>7000</c:v>
                 </c:pt>
                 <c:pt idx="6">
-                  <c:v>4600</c:v>
+                  <c:v>5100</c:v>
                 </c:pt>
                 <c:pt idx="7">
-                  <c:v>14000</c:v>
+                  <c:v>15400</c:v>
                 </c:pt>
                 <c:pt idx="8">
-                  <c:v>3900</c:v>
+                  <c:v>4300</c:v>
                 </c:pt>
                 <c:pt idx="9">
-                  <c:v>5200</c:v>
+                  <c:v>5700</c:v>
                 </c:pt>
                 <c:pt idx="10">
-                  <c:v>6400</c:v>
+                  <c:v>7000</c:v>
                 </c:pt>
                 <c:pt idx="11">
-                  <c:v>5200</c:v>
+                  <c:v>5700</c:v>
                 </c:pt>
                 <c:pt idx="12">
-                  <c:v>9100</c:v>
+                  <c:v>10000</c:v>
                 </c:pt>
                 <c:pt idx="13">
-                  <c:v>8800</c:v>
+                  <c:v>9700</c:v>
                 </c:pt>
                 <c:pt idx="14">
-                  <c:v>11600</c:v>
+                  <c:v>12700</c:v>
                 </c:pt>
                 <c:pt idx="15">
-                  <c:v>3900</c:v>
+                  <c:v>4300</c:v>
                 </c:pt>
                 <c:pt idx="16">
-                  <c:v>8800</c:v>
+                  <c:v>9700</c:v>
                 </c:pt>
                 <c:pt idx="17">
-                  <c:v>6400</c:v>
+                  <c:v>7000</c:v>
                 </c:pt>
               </c:numCache>
             </c:numRef>
@@ -1156,7 +1156,7 @@
         <c:axId val="-2100718248"/>
         <c:scaling>
           <c:orientation val="minMax"/>
-          <c:max val="15000.0"/>
+          <c:max val="20000.0"/>
           <c:min val="0.0"/>
         </c:scaling>
         <c:delete val="0"/>
@@ -1681,7 +1681,7 @@
           <a:lstStyle/>
           <a:p>
             <a:r>
-              <a:t>Services · All. March against March last year: 42.4%; Year to date (Jul to Mar 2026): $734,240; Gross margin, year to date: 63.8%. Revenue is $734,240 this financial year to date (Jul to Mar 2026). Training makes the highest gross margin (74.0%); Projects the lowest (61.5%). The business needs 56.4% gross margin just to cover overheads. Projects: 61.5% gross margin, 21.5 points over the 40.0% target ($99,164 ahead on $462,140 this financial year to date). Training: 74.0% gross margin, 34.0 points over the 40.0% target ($22,260 ahead on $65,400 this financial year to date).</a:t>
+              <a:t>Services · All. March against March last year: 43.7%; Year to date (Jul to Mar 2026): $810,325; Gross margin, year to date: 67.2%. Revenue is $810,325 this financial year to date (Jul to Mar 2026). Training makes the highest gross margin (76.4%); Projects the lowest (65.2%). The business needs 62.4% gross margin just to cover overheads. Projects: 65.2% gross margin, 25.2 points over the 40.0% target ($128,735 ahead on $511,425 this financial year to date). Training: 76.4% gross margin, 36.4 points over the 40.0% target ($26,100 ahead on $71,800 this financial year to date).</a:t>
             </a:r>
           </a:p>
         </p:txBody>
@@ -1751,7 +1751,7 @@
           <a:lstStyle/>
           <a:p>
             <a:r>
-              <a:t>Services · Projects. March against March last year: 53.5%; Year to date (Jul to Mar 2026): $462,140; Gross margin, year to date: 61.5%. Projects brought in $462,140 this financial year to date, at a 61.5% gross margin (below the 63.8% overall). Projects: 61.5% gross margin, 21.5 points over the 40.0% target ($99,164 ahead on $462,140 this financial year to date).</a:t>
+              <a:t>Services · Projects. March against March last year: 55.8%; Year to date (Jul to Mar 2026): $511,425; Gross margin, year to date: 65.2%. Projects brought in $511,425 this financial year to date, at a 65.2% gross margin (below the 67.2% overall). Projects: 65.2% gross margin, 25.2 points over the 40.0% target ($128,735 ahead on $511,425 this financial year to date).</a:t>
             </a:r>
           </a:p>
         </p:txBody>
@@ -1821,7 +1821,7 @@
           <a:lstStyle/>
           <a:p>
             <a:r>
-              <a:t>Services · Retainers. March against March last year: 29.8%; Year to date (Jul to Mar 2026): $206,700; Gross margin, year to date: 66.0%. Retainers brought in $206,700 this financial year to date, at a 66.0% gross margin (above the 63.8% overall). Retainers: 66.0% gross margin, 26.0 points over the 40.0% target ($53,640 ahead on $206,700 this financial year to date).</a:t>
+              <a:t>Services · Retainers. March against March last year: 29.6%; Year to date (Jul to Mar 2026): $227,100; Gross margin, year to date: 69.0%. Retainers brought in $227,100 this financial year to date, at a 69.0% gross margin (above the 67.2% overall). Retainers: 69.0% gross margin, 29.0 points over the 40.0% target ($65,880 ahead on $227,100 this financial year to date).</a:t>
             </a:r>
           </a:p>
         </p:txBody>
@@ -1891,7 +1891,7 @@
           <a:lstStyle/>
           <a:p>
             <a:r>
-              <a:t>Services · Training. March against March last year: 0.0%; Year to date (Jul to Mar 2026): $65,400; Gross margin, year to date: 74.0%. Training brought in $65,400 this financial year to date, at a 74.0% gross margin (above the 63.8% overall). Training: 74.0% gross margin, 34.0 points over the 40.0% target ($22,260 ahead on $65,400 this financial year to date).</a:t>
+              <a:t>Services · Training. March against March last year: 0.0%; Year to date (Jul to Mar 2026): $71,800; Gross margin, year to date: 76.4%. Training brought in $71,800 this financial year to date, at a 76.4% gross margin (above the 67.2% overall). Training: 76.4% gross margin, 36.4 points over the 40.0% target ($26,100 ahead on $71,800 this financial year to date).</a:t>
             </a:r>
           </a:p>
         </p:txBody>
@@ -1961,7 +1961,7 @@
           <a:lstStyle/>
           <a:p>
             <a:r>
-              <a:t>By type of work: financial year to date (Jul to Mar 2026) against the same period last year · Services. Same period last year: Not available: the data starts October 2024. From gross margin to profit: March's client work made $69,145 gross margin (62.9%). Consultant time not charged to client work took $10,380 and overheads $51,560, leaving $7,205 profit before tax (6.6% of revenue). To cover overheads, client work needs a 56.4% gross margin on average.</a:t>
+              <a:t>By type of work: financial year to date (Jul to Mar 2026) against the same period last year · Services. Same period last year: Not available: the data starts October 2024. From gross margin to profit: March's client work made $80,495 gross margin (66.4%). Consultant time not charged to client work took $24,072 and overheads $51,560, leaving $4,863 profit before tax (4.0% of revenue). To cover overheads, client work needs a 62.4% gross margin on average.</a:t>
             </a:r>
           </a:p>
         </p:txBody>
@@ -5376,7 +5376,7 @@
                 </a:solidFill>
                 <a:latin typeface="Roboto"/>
               </a:rPr>
-              <a:t>Data retrieved 2pm, Tue 6 Oct 2026 · Generated 8 Oct 2026, 9:35am · Sample data · Made with Python (python-pptx)</a:t>
+              <a:t>Data retrieved 2pm, Tue 6 Oct 2026 · Generated 9 Oct 2026, 8:41am · Sample data · Made with Python (python-pptx)</a:t>
             </a:r>
           </a:p>
         </p:txBody>
@@ -5722,7 +5722,7 @@
                 </a:solidFill>
                 <a:latin typeface="Roboto"/>
               </a:rPr>
-              <a:t>42.4%</a:t>
+              <a:t>43.7%</a:t>
             </a:r>
           </a:p>
         </p:txBody>
@@ -5761,7 +5761,7 @@
                 </a:solidFill>
                 <a:latin typeface="Roboto"/>
               </a:rPr>
-              <a:t>$109,865 against $77,175</a:t>
+              <a:t>$121,215 against $84,340</a:t>
             </a:r>
           </a:p>
         </p:txBody>
@@ -5888,7 +5888,7 @@
                 </a:solidFill>
                 <a:latin typeface="Roboto"/>
               </a:rPr>
-              <a:t>$734,240</a:t>
+              <a:t>$810,325</a:t>
             </a:r>
           </a:p>
         </p:txBody>
@@ -6054,7 +6054,7 @@
                 </a:solidFill>
                 <a:latin typeface="Roboto"/>
               </a:rPr>
-              <a:t>63.8%</a:t>
+              <a:t>67.2%</a:t>
             </a:r>
           </a:p>
         </p:txBody>
@@ -6093,7 +6093,7 @@
                 </a:solidFill>
                 <a:latin typeface="Roboto"/>
               </a:rPr>
-              <a:t>$468,760 before overheads</a:t>
+              <a:t>$544,845 before overheads</a:t>
             </a:r>
           </a:p>
         </p:txBody>
@@ -6238,7 +6238,7 @@
                 </a:solidFill>
                 <a:latin typeface="Roboto"/>
               </a:rPr>
-              <a:t>Revenue is $734,240 this financial year to date (Jul to Mar 2026). Training makes the highest gross margin (74.0%); Projects the lowest (61.5%). The business needs 56.4% gross margin just to cover overheads.</a:t>
+              <a:t>Revenue is $810,325 this financial year to date (Jul to Mar 2026). Training makes the highest gross margin (76.4%); Projects the lowest (65.2%). The business needs 62.4% gross margin just to cover overheads.</a:t>
             </a:r>
           </a:p>
         </p:txBody>
@@ -6365,7 +6365,7 @@
                 </a:solidFill>
                 <a:latin typeface="Roboto"/>
               </a:rPr>
-              <a:t>Projects: 61.5% gross margin, 21.5 points over the 40.0% target ($99,164 ahead on $462,140 this financial year to date). Training: 74.0% gross margin, 34.0 points over the 40.0% target ($22,260 ahead on $65,400 this financial year to date).</a:t>
+              <a:t>Projects: 65.2% gross margin, 25.2 points over the 40.0% target ($128,735 ahead on $511,425 this financial year to date). Training: 76.4% gross margin, 36.4 points over the 40.0% target ($26,100 ahead on $71,800 this financial year to date).</a:t>
             </a:r>
           </a:p>
         </p:txBody>
@@ -6443,7 +6443,7 @@
                 </a:solidFill>
                 <a:latin typeface="Roboto"/>
               </a:rPr>
-              <a:t>Data retrieved 2pm, Tue 6 Oct 2026 · Generated 8 Oct 2026, 9:35am · Sample data · Made with Python (python-pptx)</a:t>
+              <a:t>Data retrieved 2pm, Tue 6 Oct 2026 · Generated 9 Oct 2026, 8:41am · Sample data · Made with Python (python-pptx)</a:t>
             </a:r>
           </a:p>
         </p:txBody>
@@ -6789,7 +6789,7 @@
                 </a:solidFill>
                 <a:latin typeface="Roboto"/>
               </a:rPr>
-              <a:t>53.5%</a:t>
+              <a:t>55.8%</a:t>
             </a:r>
           </a:p>
         </p:txBody>
@@ -6828,7 +6828,7 @@
                 </a:solidFill>
                 <a:latin typeface="Roboto"/>
               </a:rPr>
-              <a:t>$75,165 against $48,975</a:t>
+              <a:t>$83,115 against $53,340</a:t>
             </a:r>
           </a:p>
         </p:txBody>
@@ -6955,7 +6955,7 @@
                 </a:solidFill>
                 <a:latin typeface="Roboto"/>
               </a:rPr>
-              <a:t>$462,140</a:t>
+              <a:t>$511,425</a:t>
             </a:r>
           </a:p>
         </p:txBody>
@@ -7121,7 +7121,7 @@
                 </a:solidFill>
                 <a:latin typeface="Roboto"/>
               </a:rPr>
-              <a:t>61.5%</a:t>
+              <a:t>65.2%</a:t>
             </a:r>
           </a:p>
         </p:txBody>
@@ -7160,7 +7160,7 @@
                 </a:solidFill>
                 <a:latin typeface="Roboto"/>
               </a:rPr>
-              <a:t>$284,020 before overheads</a:t>
+              <a:t>$333,305 before overheads</a:t>
             </a:r>
           </a:p>
         </p:txBody>
@@ -7305,7 +7305,7 @@
                 </a:solidFill>
                 <a:latin typeface="Roboto"/>
               </a:rPr>
-              <a:t>Projects brought in $462,140 this financial year to date, at a 61.5% gross margin (below the 63.8% overall).</a:t>
+              <a:t>Projects brought in $511,425 this financial year to date, at a 65.2% gross margin (below the 67.2% overall).</a:t>
             </a:r>
           </a:p>
         </p:txBody>
@@ -7432,7 +7432,7 @@
                 </a:solidFill>
                 <a:latin typeface="Roboto"/>
               </a:rPr>
-              <a:t>Projects: 61.5% gross margin, 21.5 points over the 40.0% target ($99,164 ahead on $462,140 this financial year to date).</a:t>
+              <a:t>Projects: 65.2% gross margin, 25.2 points over the 40.0% target ($128,735 ahead on $511,425 this financial year to date).</a:t>
             </a:r>
           </a:p>
         </p:txBody>
@@ -7510,7 +7510,7 @@
                 </a:solidFill>
                 <a:latin typeface="Roboto"/>
               </a:rPr>
-              <a:t>Data retrieved 2pm, Tue 6 Oct 2026 · Generated 8 Oct 2026, 9:35am · Sample data · Made with Python (python-pptx)</a:t>
+              <a:t>Data retrieved 2pm, Tue 6 Oct 2026 · Generated 9 Oct 2026, 8:41am · Sample data · Made with Python (python-pptx)</a:t>
             </a:r>
           </a:p>
         </p:txBody>
@@ -7856,7 +7856,7 @@
                 </a:solidFill>
                 <a:latin typeface="Roboto"/>
               </a:rPr>
-              <a:t>29.8%</a:t>
+              <a:t>29.6%</a:t>
             </a:r>
           </a:p>
         </p:txBody>
@@ -7895,7 +7895,7 @@
                 </a:solidFill>
                 <a:latin typeface="Roboto"/>
               </a:rPr>
-              <a:t>$28,300 against $21,800</a:t>
+              <a:t>$31,100 against $24,000</a:t>
             </a:r>
           </a:p>
         </p:txBody>
@@ -8022,7 +8022,7 @@
                 </a:solidFill>
                 <a:latin typeface="Roboto"/>
               </a:rPr>
-              <a:t>$206,700</a:t>
+              <a:t>$227,100</a:t>
             </a:r>
           </a:p>
         </p:txBody>
@@ -8188,7 +8188,7 @@
                 </a:solidFill>
                 <a:latin typeface="Roboto"/>
               </a:rPr>
-              <a:t>66.0%</a:t>
+              <a:t>69.0%</a:t>
             </a:r>
           </a:p>
         </p:txBody>
@@ -8227,7 +8227,7 @@
                 </a:solidFill>
                 <a:latin typeface="Roboto"/>
               </a:rPr>
-              <a:t>$136,320 before overheads</a:t>
+              <a:t>$156,720 before overheads</a:t>
             </a:r>
           </a:p>
         </p:txBody>
@@ -8372,7 +8372,7 @@
                 </a:solidFill>
                 <a:latin typeface="Roboto"/>
               </a:rPr>
-              <a:t>Retainers brought in $206,700 this financial year to date, at a 66.0% gross margin (above the 63.8% overall).</a:t>
+              <a:t>Retainers brought in $227,100 this financial year to date, at a 69.0% gross margin (above the 67.2% overall).</a:t>
             </a:r>
           </a:p>
         </p:txBody>
@@ -8499,7 +8499,7 @@
                 </a:solidFill>
                 <a:latin typeface="Roboto"/>
               </a:rPr>
-              <a:t>Retainers: 66.0% gross margin, 26.0 points over the 40.0% target ($53,640 ahead on $206,700 this financial year to date).</a:t>
+              <a:t>Retainers: 69.0% gross margin, 29.0 points over the 40.0% target ($65,880 ahead on $227,100 this financial year to date).</a:t>
             </a:r>
           </a:p>
         </p:txBody>
@@ -8577,7 +8577,7 @@
                 </a:solidFill>
                 <a:latin typeface="Roboto"/>
               </a:rPr>
-              <a:t>Data retrieved 2pm, Tue 6 Oct 2026 · Generated 8 Oct 2026, 9:35am · Sample data · Made with Python (python-pptx)</a:t>
+              <a:t>Data retrieved 2pm, Tue 6 Oct 2026 · Generated 9 Oct 2026, 8:41am · Sample data · Made with Python (python-pptx)</a:t>
             </a:r>
           </a:p>
         </p:txBody>
@@ -8962,7 +8962,7 @@
                 </a:solidFill>
                 <a:latin typeface="Roboto"/>
               </a:rPr>
-              <a:t>$6,400 against $6,400</a:t>
+              <a:t>$7,000 against $7,000</a:t>
             </a:r>
           </a:p>
         </p:txBody>
@@ -9089,7 +9089,7 @@
                 </a:solidFill>
                 <a:latin typeface="Roboto"/>
               </a:rPr>
-              <a:t>$65,400</a:t>
+              <a:t>$71,800</a:t>
             </a:r>
           </a:p>
         </p:txBody>
@@ -9255,7 +9255,7 @@
                 </a:solidFill>
                 <a:latin typeface="Roboto"/>
               </a:rPr>
-              <a:t>74.0%</a:t>
+              <a:t>76.4%</a:t>
             </a:r>
           </a:p>
         </p:txBody>
@@ -9294,7 +9294,7 @@
                 </a:solidFill>
                 <a:latin typeface="Roboto"/>
               </a:rPr>
-              <a:t>$48,420 before overheads</a:t>
+              <a:t>$54,820 before overheads</a:t>
             </a:r>
           </a:p>
         </p:txBody>
@@ -9439,7 +9439,7 @@
                 </a:solidFill>
                 <a:latin typeface="Roboto"/>
               </a:rPr>
-              <a:t>Training brought in $65,400 this financial year to date, at a 74.0% gross margin (above the 63.8% overall).</a:t>
+              <a:t>Training brought in $71,800 this financial year to date, at a 76.4% gross margin (above the 67.2% overall).</a:t>
             </a:r>
           </a:p>
         </p:txBody>
@@ -9566,7 +9566,7 @@
                 </a:solidFill>
                 <a:latin typeface="Roboto"/>
               </a:rPr>
-              <a:t>Training: 74.0% gross margin, 34.0 points over the 40.0% target ($22,260 ahead on $65,400 this financial year to date).</a:t>
+              <a:t>Training: 76.4% gross margin, 36.4 points over the 40.0% target ($26,100 ahead on $71,800 this financial year to date).</a:t>
             </a:r>
           </a:p>
         </p:txBody>
@@ -9644,7 +9644,7 @@
                 </a:solidFill>
                 <a:latin typeface="Roboto"/>
               </a:rPr>
-              <a:t>Data retrieved 2pm, Tue 6 Oct 2026 · Generated 8 Oct 2026, 9:35am · Sample data · Made with Python (python-pptx)</a:t>
+              <a:t>Data retrieved 2pm, Tue 6 Oct 2026 · Generated 9 Oct 2026, 8:41am · Sample data · Made with Python (python-pptx)</a:t>
             </a:r>
           </a:p>
         </p:txBody>
@@ -9863,7 +9863,7 @@
                 </a:solidFill>
                 <a:latin typeface="Roboto"/>
               </a:rPr>
-              <a:t>Same period last year: Not available: the data starts October 2024. From gross margin to profit: March's client work made $69,145 gross margin (62.9%). Consultant time not charged to client work took $10,380 and overheads $51,560, leaving $7,205 profit before tax (6.6% of revenue). To cover overheads, client work needs a 56.4% gross margin on average.</a:t>
+              <a:t>Same period last year: Not available: the data starts October 2024. From gross margin to profit: March's client work made $80,495 gross margin (66.4%). Consultant time not charged to client work took $24,072 and overheads $51,560, leaving $4,863 profit before tax (4.0% of revenue). To cover overheads, client work needs a 62.4% gross margin on average.</a:t>
             </a:r>
           </a:p>
         </p:txBody>
@@ -10094,7 +10094,7 @@
                           </a:solidFill>
                           <a:latin typeface="Roboto"/>
                         </a:rPr>
-                        <a:t>$462,140</a:t>
+                        <a:t>$511,425</a:t>
                       </a:r>
                     </a:p>
                   </a:txBody>
@@ -10175,7 +10175,7 @@
                           </a:solidFill>
                           <a:latin typeface="Roboto"/>
                         </a:rPr>
-                        <a:t>$284,020</a:t>
+                        <a:t>$333,305</a:t>
                       </a:r>
                     </a:p>
                   </a:txBody>
@@ -10202,7 +10202,7 @@
                           </a:solidFill>
                           <a:latin typeface="Roboto"/>
                         </a:rPr>
-                        <a:t>61.5%</a:t>
+                        <a:t>65.2%</a:t>
                       </a:r>
                     </a:p>
                   </a:txBody>
@@ -10258,7 +10258,7 @@
                           </a:solidFill>
                           <a:latin typeface="Roboto"/>
                         </a:rPr>
-                        <a:t>$206,700</a:t>
+                        <a:t>$227,100</a:t>
                       </a:r>
                     </a:p>
                   </a:txBody>
@@ -10339,7 +10339,7 @@
                           </a:solidFill>
                           <a:latin typeface="Roboto"/>
                         </a:rPr>
-                        <a:t>$136,320</a:t>
+                        <a:t>$156,720</a:t>
                       </a:r>
                     </a:p>
                   </a:txBody>
@@ -10366,7 +10366,7 @@
                           </a:solidFill>
                           <a:latin typeface="Roboto"/>
                         </a:rPr>
-                        <a:t>66.0%</a:t>
+                        <a:t>69.0%</a:t>
                       </a:r>
                     </a:p>
                   </a:txBody>
@@ -10422,7 +10422,7 @@
                           </a:solidFill>
                           <a:latin typeface="Roboto"/>
                         </a:rPr>
-                        <a:t>$65,400</a:t>
+                        <a:t>$71,800</a:t>
                       </a:r>
                     </a:p>
                   </a:txBody>
@@ -10503,7 +10503,7 @@
                           </a:solidFill>
                           <a:latin typeface="Roboto"/>
                         </a:rPr>
-                        <a:t>$48,420</a:t>
+                        <a:t>$54,820</a:t>
                       </a:r>
                     </a:p>
                   </a:txBody>
@@ -10530,7 +10530,7 @@
                           </a:solidFill>
                           <a:latin typeface="Roboto"/>
                         </a:rPr>
-                        <a:t>74.0%</a:t>
+                        <a:t>76.4%</a:t>
                       </a:r>
                     </a:p>
                   </a:txBody>
@@ -10586,7 +10586,7 @@
                           </a:solidFill>
                           <a:latin typeface="Roboto"/>
                         </a:rPr>
-                        <a:t>$734,240</a:t>
+                        <a:t>$810,325</a:t>
                       </a:r>
                     </a:p>
                   </a:txBody>
@@ -10667,7 +10667,7 @@
                           </a:solidFill>
                           <a:latin typeface="Roboto"/>
                         </a:rPr>
-                        <a:t>$468,760</a:t>
+                        <a:t>$544,845</a:t>
                       </a:r>
                     </a:p>
                   </a:txBody>
@@ -10694,7 +10694,7 @@
                           </a:solidFill>
                           <a:latin typeface="Roboto"/>
                         </a:rPr>
-                        <a:t>63.8%</a:t>
+                        <a:t>67.2%</a:t>
                       </a:r>
                     </a:p>
                   </a:txBody>
@@ -10782,7 +10782,7 @@
                 </a:solidFill>
                 <a:latin typeface="Roboto"/>
               </a:rPr>
-              <a:t>Data retrieved 2pm, Tue 6 Oct 2026 · Generated 8 Oct 2026, 9:35am · Sample data · Made with Python (python-pptx)</a:t>
+              <a:t>Data retrieved 2pm, Tue 6 Oct 2026 · Generated 9 Oct 2026, 8:41am · Sample data · Made with Python (python-pptx)</a:t>
             </a:r>
           </a:p>
         </p:txBody>
